--- a/images/Sladkovodne_ryby_styl.pptx
+++ b/images/Sladkovodne_ryby_styl.pptx
@@ -17,11 +17,11 @@
     <p:sldId id="263" r:id="rId9"/>
     <p:sldId id="264" r:id="rId10"/>
     <p:sldId id="265" r:id="rId11"/>
-    <p:sldId id="283" r:id="rId12"/>
-    <p:sldId id="266" r:id="rId13"/>
-    <p:sldId id="268" r:id="rId14"/>
-    <p:sldId id="269" r:id="rId15"/>
-    <p:sldId id="270" r:id="rId16"/>
+    <p:sldId id="266" r:id="rId12"/>
+    <p:sldId id="268" r:id="rId13"/>
+    <p:sldId id="269" r:id="rId14"/>
+    <p:sldId id="270" r:id="rId15"/>
+    <p:sldId id="271" r:id="rId16"/>
   </p:sldIdLst>
   <p:sldSz cy="5143500" cx="9144000"/>
   <p:notesSz cx="5143500" cy="9144000"/>
@@ -130,7 +130,7 @@
     </p:bg>
     <p:spTree>
       <p:nvGrpSpPr>
-        <p:cNvPr id="57" name=""/>
+        <p:cNvPr id="61" name=""/>
         <p:cNvGrpSpPr/>
         <p:nvPr/>
       </p:nvGrpSpPr>
@@ -144,7 +144,7 @@
       </p:grpSpPr>
       <p:sp>
         <p:nvSpPr>
-          <p:cNvPr id="1048700" name="Header Placeholder 1"/>
+          <p:cNvPr id="1048706" name="Header Placeholder 1"/>
           <p:cNvSpPr>
             <a:spLocks noGrp="1"/>
           </p:cNvSpPr>
@@ -173,7 +173,7 @@
       </p:sp>
       <p:sp>
         <p:nvSpPr>
-          <p:cNvPr id="1048701" name="Date Placeholder 2"/>
+          <p:cNvPr id="1048707" name="Date Placeholder 2"/>
           <p:cNvSpPr>
             <a:spLocks noGrp="1"/>
           </p:cNvSpPr>
@@ -205,7 +205,7 @@
       </p:sp>
       <p:sp>
         <p:nvSpPr>
-          <p:cNvPr id="1048702" name="Slide Image Placeholder 3"/>
+          <p:cNvPr id="1048708" name="Slide Image Placeholder 3"/>
           <p:cNvSpPr>
             <a:spLocks noChangeAspect="1" noRot="1" noGrp="1"/>
           </p:cNvSpPr>
@@ -235,7 +235,7 @@
       </p:sp>
       <p:sp>
         <p:nvSpPr>
-          <p:cNvPr id="1048703" name="Notes Placeholder 4"/>
+          <p:cNvPr id="1048709" name="Notes Placeholder 4"/>
           <p:cNvSpPr>
             <a:spLocks noGrp="1"/>
           </p:cNvSpPr>
@@ -296,7 +296,7 @@
       </p:sp>
       <p:sp>
         <p:nvSpPr>
-          <p:cNvPr id="1048704" name="Footer Placeholder 5"/>
+          <p:cNvPr id="1048710" name="Footer Placeholder 5"/>
           <p:cNvSpPr>
             <a:spLocks noGrp="1"/>
           </p:cNvSpPr>
@@ -325,7 +325,7 @@
       </p:sp>
       <p:sp>
         <p:nvSpPr>
-          <p:cNvPr id="1048705" name="Slide Number Placeholder 6"/>
+          <p:cNvPr id="1048711" name="Slide Number Placeholder 6"/>
           <p:cNvSpPr>
             <a:spLocks noGrp="1"/>
           </p:cNvSpPr>
@@ -458,7 +458,7 @@
   <p:cSld>
     <p:spTree>
       <p:nvGrpSpPr>
-        <p:cNvPr id="17" name=""/>
+        <p:cNvPr id="42" name=""/>
         <p:cNvGrpSpPr/>
         <p:nvPr/>
       </p:nvGrpSpPr>
@@ -472,7 +472,7 @@
       </p:grpSpPr>
       <p:sp>
         <p:nvSpPr>
-          <p:cNvPr id="1048582" name="Slide Image Placeholder 1"/>
+          <p:cNvPr id="1048658" name="Slide Image Placeholder 1"/>
           <p:cNvSpPr>
             <a:spLocks noChangeAspect="1" noRot="1" noGrp="1"/>
           </p:cNvSpPr>
@@ -484,7 +484,7 @@
       </p:sp>
       <p:sp>
         <p:nvSpPr>
-          <p:cNvPr id="1048583" name="Notes Placeholder 2"/>
+          <p:cNvPr id="1048659" name="Notes Placeholder 2"/>
           <p:cNvSpPr>
             <a:spLocks noGrp="1"/>
           </p:cNvSpPr>
@@ -502,7 +502,7 @@
       </p:sp>
       <p:sp>
         <p:nvSpPr>
-          <p:cNvPr id="1048584" name="Slide Number Placeholder 3"/>
+          <p:cNvPr id="1048660" name="Slide Number Placeholder 3"/>
           <p:cNvSpPr>
             <a:spLocks noGrp="1"/>
           </p:cNvSpPr>
@@ -534,7 +534,7 @@
   <p:cSld>
     <p:spTree>
       <p:nvGrpSpPr>
-        <p:cNvPr id="64" name=""/>
+        <p:cNvPr id="30" name=""/>
         <p:cNvGrpSpPr/>
         <p:nvPr/>
       </p:nvGrpSpPr>
@@ -548,7 +548,7 @@
       </p:grpSpPr>
       <p:sp>
         <p:nvSpPr>
-          <p:cNvPr id="1048709" name="Slide Image Placeholder 1"/>
+          <p:cNvPr id="1048607" name="Slide Image Placeholder 1"/>
           <p:cNvSpPr>
             <a:spLocks noChangeAspect="1" noRot="1" noGrp="1"/>
           </p:cNvSpPr>
@@ -560,7 +560,7 @@
       </p:sp>
       <p:sp>
         <p:nvSpPr>
-          <p:cNvPr id="1048710" name="Notes Placeholder 2"/>
+          <p:cNvPr id="1048608" name="Notes Placeholder 2"/>
           <p:cNvSpPr>
             <a:spLocks noGrp="1"/>
           </p:cNvSpPr>
@@ -578,7 +578,7 @@
       </p:sp>
       <p:sp>
         <p:nvSpPr>
-          <p:cNvPr id="1048711" name="Slide Number Placeholder 3"/>
+          <p:cNvPr id="1048609" name="Slide Number Placeholder 3"/>
           <p:cNvSpPr>
             <a:spLocks noGrp="1"/>
           </p:cNvSpPr>
@@ -610,7 +610,7 @@
   <p:cSld>
     <p:spTree>
       <p:nvGrpSpPr>
-        <p:cNvPr id="47" name=""/>
+        <p:cNvPr id="36" name=""/>
         <p:cNvGrpSpPr/>
         <p:nvPr/>
       </p:nvGrpSpPr>
@@ -624,7 +624,7 @@
       </p:grpSpPr>
       <p:sp>
         <p:nvSpPr>
-          <p:cNvPr id="1048678" name="Slide Image Placeholder 1"/>
+          <p:cNvPr id="1048629" name="Slide Image Placeholder 1"/>
           <p:cNvSpPr>
             <a:spLocks noChangeAspect="1" noRot="1" noGrp="1"/>
           </p:cNvSpPr>
@@ -636,7 +636,7 @@
       </p:sp>
       <p:sp>
         <p:nvSpPr>
-          <p:cNvPr id="1048679" name="Notes Placeholder 2"/>
+          <p:cNvPr id="1048630" name="Notes Placeholder 2"/>
           <p:cNvSpPr>
             <a:spLocks noGrp="1"/>
           </p:cNvSpPr>
@@ -654,7 +654,7 @@
       </p:sp>
       <p:sp>
         <p:nvSpPr>
-          <p:cNvPr id="1048680" name="Slide Number Placeholder 3"/>
+          <p:cNvPr id="1048631" name="Slide Number Placeholder 3"/>
           <p:cNvSpPr>
             <a:spLocks noGrp="1"/>
           </p:cNvSpPr>
@@ -686,7 +686,7 @@
   <p:cSld>
     <p:spTree>
       <p:nvGrpSpPr>
-        <p:cNvPr id="50" name=""/>
+        <p:cNvPr id="54" name=""/>
         <p:cNvGrpSpPr/>
         <p:nvPr/>
       </p:nvGrpSpPr>
@@ -700,7 +700,7 @@
       </p:grpSpPr>
       <p:sp>
         <p:nvSpPr>
-          <p:cNvPr id="1048684" name="Slide Image Placeholder 1"/>
+          <p:cNvPr id="1048690" name="Slide Image Placeholder 1"/>
           <p:cNvSpPr>
             <a:spLocks noChangeAspect="1" noRot="1" noGrp="1"/>
           </p:cNvSpPr>
@@ -712,7 +712,7 @@
       </p:sp>
       <p:sp>
         <p:nvSpPr>
-          <p:cNvPr id="1048685" name="Notes Placeholder 2"/>
+          <p:cNvPr id="1048691" name="Notes Placeholder 2"/>
           <p:cNvSpPr>
             <a:spLocks noGrp="1"/>
           </p:cNvSpPr>
@@ -730,7 +730,7 @@
       </p:sp>
       <p:sp>
         <p:nvSpPr>
-          <p:cNvPr id="1048686" name="Slide Number Placeholder 3"/>
+          <p:cNvPr id="1048692" name="Slide Number Placeholder 3"/>
           <p:cNvSpPr>
             <a:spLocks noGrp="1"/>
           </p:cNvSpPr>
@@ -762,7 +762,7 @@
   <p:cSld>
     <p:spTree>
       <p:nvGrpSpPr>
-        <p:cNvPr id="53" name=""/>
+        <p:cNvPr id="57" name=""/>
         <p:cNvGrpSpPr/>
         <p:nvPr/>
       </p:nvGrpSpPr>
@@ -776,7 +776,7 @@
       </p:grpSpPr>
       <p:sp>
         <p:nvSpPr>
-          <p:cNvPr id="1048690" name="Slide Image Placeholder 1"/>
+          <p:cNvPr id="1048696" name="Slide Image Placeholder 1"/>
           <p:cNvSpPr>
             <a:spLocks noChangeAspect="1" noRot="1" noGrp="1"/>
           </p:cNvSpPr>
@@ -788,7 +788,7 @@
       </p:sp>
       <p:sp>
         <p:nvSpPr>
-          <p:cNvPr id="1048691" name="Notes Placeholder 2"/>
+          <p:cNvPr id="1048697" name="Notes Placeholder 2"/>
           <p:cNvSpPr>
             <a:spLocks noGrp="1"/>
           </p:cNvSpPr>
@@ -806,7 +806,7 @@
       </p:sp>
       <p:sp>
         <p:nvSpPr>
-          <p:cNvPr id="1048692" name="Slide Number Placeholder 3"/>
+          <p:cNvPr id="1048698" name="Slide Number Placeholder 3"/>
           <p:cNvSpPr>
             <a:spLocks noGrp="1"/>
           </p:cNvSpPr>
@@ -838,7 +838,7 @@
   <p:cSld>
     <p:spTree>
       <p:nvGrpSpPr>
-        <p:cNvPr id="56" name=""/>
+        <p:cNvPr id="60" name=""/>
         <p:cNvGrpSpPr/>
         <p:nvPr/>
       </p:nvGrpSpPr>
@@ -852,7 +852,7 @@
       </p:grpSpPr>
       <p:sp>
         <p:nvSpPr>
-          <p:cNvPr id="1048697" name="Slide Image Placeholder 1"/>
+          <p:cNvPr id="1048703" name="Slide Image Placeholder 1"/>
           <p:cNvSpPr>
             <a:spLocks noChangeAspect="1" noRot="1" noGrp="1"/>
           </p:cNvSpPr>
@@ -864,7 +864,7 @@
       </p:sp>
       <p:sp>
         <p:nvSpPr>
-          <p:cNvPr id="1048698" name="Notes Placeholder 2"/>
+          <p:cNvPr id="1048704" name="Notes Placeholder 2"/>
           <p:cNvSpPr>
             <a:spLocks noGrp="1"/>
           </p:cNvSpPr>
@@ -882,7 +882,7 @@
       </p:sp>
       <p:sp>
         <p:nvSpPr>
-          <p:cNvPr id="1048699" name="Slide Number Placeholder 3"/>
+          <p:cNvPr id="1048705" name="Slide Number Placeholder 3"/>
           <p:cNvSpPr>
             <a:spLocks noGrp="1"/>
           </p:cNvSpPr>
@@ -914,7 +914,7 @@
   <p:cSld>
     <p:spTree>
       <p:nvGrpSpPr>
-        <p:cNvPr id="23" name=""/>
+        <p:cNvPr id="45" name=""/>
         <p:cNvGrpSpPr/>
         <p:nvPr/>
       </p:nvGrpSpPr>
@@ -928,7 +928,7 @@
       </p:grpSpPr>
       <p:sp>
         <p:nvSpPr>
-          <p:cNvPr id="1048595" name="Slide Image Placeholder 1"/>
+          <p:cNvPr id="1048671" name="Slide Image Placeholder 1"/>
           <p:cNvSpPr>
             <a:spLocks noChangeAspect="1" noRot="1" noGrp="1"/>
           </p:cNvSpPr>
@@ -940,7 +940,7 @@
       </p:sp>
       <p:sp>
         <p:nvSpPr>
-          <p:cNvPr id="1048596" name="Notes Placeholder 2"/>
+          <p:cNvPr id="1048672" name="Notes Placeholder 2"/>
           <p:cNvSpPr>
             <a:spLocks noGrp="1"/>
           </p:cNvSpPr>
@@ -958,7 +958,7 @@
       </p:sp>
       <p:sp>
         <p:nvSpPr>
-          <p:cNvPr id="1048597" name="Slide Number Placeholder 3"/>
+          <p:cNvPr id="1048673" name="Slide Number Placeholder 3"/>
           <p:cNvSpPr>
             <a:spLocks noGrp="1"/>
           </p:cNvSpPr>
@@ -990,7 +990,7 @@
   <p:cSld>
     <p:spTree>
       <p:nvGrpSpPr>
-        <p:cNvPr id="26" name=""/>
+        <p:cNvPr id="48" name=""/>
         <p:cNvGrpSpPr/>
         <p:nvPr/>
       </p:nvGrpSpPr>
@@ -1004,7 +1004,7 @@
       </p:grpSpPr>
       <p:sp>
         <p:nvSpPr>
-          <p:cNvPr id="1048602" name="Slide Image Placeholder 1"/>
+          <p:cNvPr id="1048678" name="Slide Image Placeholder 1"/>
           <p:cNvSpPr>
             <a:spLocks noChangeAspect="1" noRot="1" noGrp="1"/>
           </p:cNvSpPr>
@@ -1016,7 +1016,7 @@
       </p:sp>
       <p:sp>
         <p:nvSpPr>
-          <p:cNvPr id="1048603" name="Notes Placeholder 2"/>
+          <p:cNvPr id="1048679" name="Notes Placeholder 2"/>
           <p:cNvSpPr>
             <a:spLocks noGrp="1"/>
           </p:cNvSpPr>
@@ -1034,7 +1034,7 @@
       </p:sp>
       <p:sp>
         <p:nvSpPr>
-          <p:cNvPr id="1048604" name="Slide Number Placeholder 3"/>
+          <p:cNvPr id="1048680" name="Slide Number Placeholder 3"/>
           <p:cNvSpPr>
             <a:spLocks noGrp="1"/>
           </p:cNvSpPr>
@@ -1066,7 +1066,7 @@
   <p:cSld>
     <p:spTree>
       <p:nvGrpSpPr>
-        <p:cNvPr id="29" name=""/>
+        <p:cNvPr id="51" name=""/>
         <p:cNvGrpSpPr/>
         <p:nvPr/>
       </p:nvGrpSpPr>
@@ -1080,7 +1080,7 @@
       </p:grpSpPr>
       <p:sp>
         <p:nvSpPr>
-          <p:cNvPr id="1048608" name="Slide Image Placeholder 1"/>
+          <p:cNvPr id="1048684" name="Slide Image Placeholder 1"/>
           <p:cNvSpPr>
             <a:spLocks noChangeAspect="1" noRot="1" noGrp="1"/>
           </p:cNvSpPr>
@@ -1092,7 +1092,7 @@
       </p:sp>
       <p:sp>
         <p:nvSpPr>
-          <p:cNvPr id="1048609" name="Notes Placeholder 2"/>
+          <p:cNvPr id="1048685" name="Notes Placeholder 2"/>
           <p:cNvSpPr>
             <a:spLocks noGrp="1"/>
           </p:cNvSpPr>
@@ -1110,7 +1110,7 @@
       </p:sp>
       <p:sp>
         <p:nvSpPr>
-          <p:cNvPr id="1048610" name="Slide Number Placeholder 3"/>
+          <p:cNvPr id="1048686" name="Slide Number Placeholder 3"/>
           <p:cNvSpPr>
             <a:spLocks noGrp="1"/>
           </p:cNvSpPr>
@@ -1142,7 +1142,7 @@
   <p:cSld>
     <p:spTree>
       <p:nvGrpSpPr>
-        <p:cNvPr id="32" name=""/>
+        <p:cNvPr id="39" name=""/>
         <p:cNvGrpSpPr/>
         <p:nvPr/>
       </p:nvGrpSpPr>
@@ -1156,7 +1156,7 @@
       </p:grpSpPr>
       <p:sp>
         <p:nvSpPr>
-          <p:cNvPr id="1048628" name="Slide Image Placeholder 1"/>
+          <p:cNvPr id="1048649" name="Slide Image Placeholder 1"/>
           <p:cNvSpPr>
             <a:spLocks noChangeAspect="1" noRot="1" noGrp="1"/>
           </p:cNvSpPr>
@@ -1168,7 +1168,7 @@
       </p:sp>
       <p:sp>
         <p:nvSpPr>
-          <p:cNvPr id="1048629" name="Notes Placeholder 2"/>
+          <p:cNvPr id="1048650" name="Notes Placeholder 2"/>
           <p:cNvSpPr>
             <a:spLocks noGrp="1"/>
           </p:cNvSpPr>
@@ -1186,7 +1186,7 @@
       </p:sp>
       <p:sp>
         <p:nvSpPr>
-          <p:cNvPr id="1048630" name="Slide Number Placeholder 3"/>
+          <p:cNvPr id="1048651" name="Slide Number Placeholder 3"/>
           <p:cNvSpPr>
             <a:spLocks noGrp="1"/>
           </p:cNvSpPr>
@@ -1218,7 +1218,7 @@
   <p:cSld>
     <p:spTree>
       <p:nvGrpSpPr>
-        <p:cNvPr id="35" name=""/>
+        <p:cNvPr id="33" name=""/>
         <p:cNvGrpSpPr/>
         <p:nvPr/>
       </p:nvGrpSpPr>
@@ -1232,7 +1232,7 @@
       </p:grpSpPr>
       <p:sp>
         <p:nvSpPr>
-          <p:cNvPr id="1048634" name="Slide Image Placeholder 1"/>
+          <p:cNvPr id="1048613" name="Slide Image Placeholder 1"/>
           <p:cNvSpPr>
             <a:spLocks noChangeAspect="1" noRot="1" noGrp="1"/>
           </p:cNvSpPr>
@@ -1244,7 +1244,7 @@
       </p:sp>
       <p:sp>
         <p:nvSpPr>
-          <p:cNvPr id="1048635" name="Notes Placeholder 2"/>
+          <p:cNvPr id="1048614" name="Notes Placeholder 2"/>
           <p:cNvSpPr>
             <a:spLocks noGrp="1"/>
           </p:cNvSpPr>
@@ -1262,7 +1262,7 @@
       </p:sp>
       <p:sp>
         <p:nvSpPr>
-          <p:cNvPr id="1048636" name="Slide Number Placeholder 3"/>
+          <p:cNvPr id="1048615" name="Slide Number Placeholder 3"/>
           <p:cNvSpPr>
             <a:spLocks noGrp="1"/>
           </p:cNvSpPr>
@@ -1294,7 +1294,7 @@
   <p:cSld>
     <p:spTree>
       <p:nvGrpSpPr>
-        <p:cNvPr id="38" name=""/>
+        <p:cNvPr id="27" name=""/>
         <p:cNvGrpSpPr/>
         <p:nvPr/>
       </p:nvGrpSpPr>
@@ -1308,7 +1308,7 @@
       </p:grpSpPr>
       <p:sp>
         <p:nvSpPr>
-          <p:cNvPr id="1048650" name="Slide Image Placeholder 1"/>
+          <p:cNvPr id="1048601" name="Slide Image Placeholder 1"/>
           <p:cNvSpPr>
             <a:spLocks noChangeAspect="1" noRot="1" noGrp="1"/>
           </p:cNvSpPr>
@@ -1320,7 +1320,7 @@
       </p:sp>
       <p:sp>
         <p:nvSpPr>
-          <p:cNvPr id="1048651" name="Notes Placeholder 2"/>
+          <p:cNvPr id="1048602" name="Notes Placeholder 2"/>
           <p:cNvSpPr>
             <a:spLocks noGrp="1"/>
           </p:cNvSpPr>
@@ -1338,7 +1338,7 @@
       </p:sp>
       <p:sp>
         <p:nvSpPr>
-          <p:cNvPr id="1048652" name="Slide Number Placeholder 3"/>
+          <p:cNvPr id="1048603" name="Slide Number Placeholder 3"/>
           <p:cNvSpPr>
             <a:spLocks noGrp="1"/>
           </p:cNvSpPr>
@@ -1370,7 +1370,7 @@
   <p:cSld>
     <p:spTree>
       <p:nvGrpSpPr>
-        <p:cNvPr id="41" name=""/>
+        <p:cNvPr id="17" name=""/>
         <p:cNvGrpSpPr/>
         <p:nvPr/>
       </p:nvGrpSpPr>
@@ -1384,7 +1384,7 @@
       </p:grpSpPr>
       <p:sp>
         <p:nvSpPr>
-          <p:cNvPr id="1048656" name="Slide Image Placeholder 1"/>
+          <p:cNvPr id="1048579" name="Slide Image Placeholder 1"/>
           <p:cNvSpPr>
             <a:spLocks noChangeAspect="1" noRot="1" noGrp="1"/>
           </p:cNvSpPr>
@@ -1396,7 +1396,7 @@
       </p:sp>
       <p:sp>
         <p:nvSpPr>
-          <p:cNvPr id="1048657" name="Notes Placeholder 2"/>
+          <p:cNvPr id="1048580" name="Notes Placeholder 2"/>
           <p:cNvSpPr>
             <a:spLocks noGrp="1"/>
           </p:cNvSpPr>
@@ -1414,7 +1414,7 @@
       </p:sp>
       <p:sp>
         <p:nvSpPr>
-          <p:cNvPr id="1048658" name="Slide Number Placeholder 3"/>
+          <p:cNvPr id="1048581" name="Slide Number Placeholder 3"/>
           <p:cNvSpPr>
             <a:spLocks noGrp="1"/>
           </p:cNvSpPr>
@@ -1446,7 +1446,7 @@
   <p:cSld>
     <p:spTree>
       <p:nvGrpSpPr>
-        <p:cNvPr id="44" name=""/>
+        <p:cNvPr id="24" name=""/>
         <p:cNvGrpSpPr/>
         <p:nvPr/>
       </p:nvGrpSpPr>
@@ -1460,7 +1460,7 @@
       </p:grpSpPr>
       <p:sp>
         <p:nvSpPr>
-          <p:cNvPr id="1048662" name="Slide Image Placeholder 1"/>
+          <p:cNvPr id="1048585" name="Slide Image Placeholder 1"/>
           <p:cNvSpPr>
             <a:spLocks noChangeAspect="1" noRot="1" noGrp="1"/>
           </p:cNvSpPr>
@@ -1472,7 +1472,7 @@
       </p:sp>
       <p:sp>
         <p:nvSpPr>
-          <p:cNvPr id="1048663" name="Notes Placeholder 2"/>
+          <p:cNvPr id="1048586" name="Notes Placeholder 2"/>
           <p:cNvSpPr>
             <a:spLocks noGrp="1"/>
           </p:cNvSpPr>
@@ -1490,7 +1490,7 @@
       </p:sp>
       <p:sp>
         <p:nvSpPr>
-          <p:cNvPr id="1048664" name="Slide Number Placeholder 3"/>
+          <p:cNvPr id="1048587" name="Slide Number Placeholder 3"/>
           <p:cNvSpPr>
             <a:spLocks noGrp="1"/>
           </p:cNvSpPr>
@@ -1842,7 +1842,7 @@
     </p:bg>
     <p:spTree>
       <p:nvGrpSpPr>
-        <p:cNvPr id="15" name=""/>
+        <p:cNvPr id="40" name=""/>
         <p:cNvGrpSpPr/>
         <p:nvPr/>
       </p:nvGrpSpPr>
@@ -1856,7 +1856,7 @@
       </p:grpSpPr>
       <p:pic>
         <p:nvPicPr>
-          <p:cNvPr id="2097152" name="Image 0" descr="https://upload.wikimedia.org/wikipedia/commons/thumb/e/e8/Esox_lucius_1.jpg/1280px-Esox_lucius_1.jpg"/>
+          <p:cNvPr id="2097159" name="Image 0" descr="https://upload.wikimedia.org/wikipedia/commons/thumb/e/e8/Esox_lucius_1.jpg/1280px-Esox_lucius_1.jpg"/>
           <p:cNvPicPr>
             <a:picLocks noChangeAspect="1"/>
           </p:cNvPicPr>
@@ -1881,7 +1881,7 @@
       </p:pic>
       <p:sp>
         <p:nvSpPr>
-          <p:cNvPr id="1048576" name="Shape 0"/>
+          <p:cNvPr id="1048652" name="Shape 0"/>
           <p:cNvSpPr/>
           <p:nvPr/>
         </p:nvSpPr>
@@ -1908,7 +1908,7 @@
       </p:sp>
       <p:sp>
         <p:nvSpPr>
-          <p:cNvPr id="1048577" name="Shape 1"/>
+          <p:cNvPr id="1048653" name="Shape 1"/>
           <p:cNvSpPr/>
           <p:nvPr/>
         </p:nvSpPr>
@@ -1931,7 +1931,7 @@
       </p:sp>
       <p:sp>
         <p:nvSpPr>
-          <p:cNvPr id="1048578" name="Text 2"/>
+          <p:cNvPr id="1048654" name="Text 2"/>
           <p:cNvSpPr/>
           <p:nvPr/>
         </p:nvSpPr>
@@ -1966,7 +1966,7 @@
       </p:sp>
       <p:sp>
         <p:nvSpPr>
-          <p:cNvPr id="1048579" name="Text 3"/>
+          <p:cNvPr id="1048655" name="Text 3"/>
           <p:cNvSpPr/>
           <p:nvPr/>
         </p:nvSpPr>
@@ -2001,7 +2001,7 @@
       </p:sp>
       <p:sp>
         <p:nvSpPr>
-          <p:cNvPr id="1048580" name="Text 4"/>
+          <p:cNvPr id="1048656" name="Text 4"/>
           <p:cNvSpPr/>
           <p:nvPr/>
         </p:nvSpPr>
@@ -2036,7 +2036,7 @@
       </p:sp>
       <p:sp>
         <p:nvSpPr>
-          <p:cNvPr id="1048581" name="Text 5"/>
+          <p:cNvPr id="1048657" name="Text 5"/>
           <p:cNvSpPr/>
           <p:nvPr/>
         </p:nvSpPr>
@@ -2090,7 +2090,7 @@
     </p:bg>
     <p:spTree>
       <p:nvGrpSpPr>
-        <p:cNvPr id="62" name=""/>
+        <p:cNvPr id="28" name=""/>
         <p:cNvGrpSpPr/>
         <p:nvPr/>
       </p:nvGrpSpPr>
@@ -2104,7 +2104,7 @@
       </p:grpSpPr>
       <p:pic>
         <p:nvPicPr>
-          <p:cNvPr id="2097166" name="Image 0" descr="https://upload.wikimedia.org/wikipedia/commons/thumb/4/4e/Esox_lucius.jpg/1280px-Esox_lucius.jpg"/>
+          <p:cNvPr id="2097155" name="Image 0" descr="https://upload.wikimedia.org/wikipedia/commons/thumb/4/4e/Esox_lucius.jpg/1280px-Esox_lucius.jpg"/>
           <p:cNvPicPr>
             <a:picLocks noChangeAspect="1"/>
           </p:cNvPicPr>
@@ -2127,7 +2127,7 @@
       </p:pic>
       <p:sp>
         <p:nvSpPr>
-          <p:cNvPr id="1048706" name="Shape 0"/>
+          <p:cNvPr id="1048604" name="Shape 0"/>
           <p:cNvSpPr/>
           <p:nvPr/>
         </p:nvSpPr>
@@ -2154,7 +2154,7 @@
       </p:sp>
       <p:sp>
         <p:nvSpPr>
-          <p:cNvPr id="1048707" name="Text 1"/>
+          <p:cNvPr id="1048605" name="Text 1"/>
           <p:cNvSpPr/>
           <p:nvPr/>
         </p:nvSpPr>
@@ -2266,7 +2266,7 @@
       </p:sp>
       <p:sp>
         <p:nvSpPr>
-          <p:cNvPr id="1048708" name="Text 2"/>
+          <p:cNvPr id="1048606" name="Text 2"/>
           <p:cNvSpPr/>
           <p:nvPr/>
         </p:nvSpPr>
@@ -3609,7 +3609,7 @@
     </p:bg>
     <p:spTree>
       <p:nvGrpSpPr>
-        <p:cNvPr id="45" name=""/>
+        <p:cNvPr id="34" name=""/>
         <p:cNvGrpSpPr/>
         <p:nvPr/>
       </p:nvGrpSpPr>
@@ -3623,7 +3623,7 @@
       </p:grpSpPr>
       <p:pic>
         <p:nvPicPr>
-          <p:cNvPr id="2097162" name="Image 0" descr="https://upload.wikimedia.org/wikipedia/commons/thumb/e/e8/Esox_lucius_1.jpg/1280px-Esox_lucius_1.jpg"/>
+          <p:cNvPr id="2097157" name="Image 0" descr="https://upload.wikimedia.org/wikipedia/commons/thumb/e/e8/Esox_lucius_1.jpg/1280px-Esox_lucius_1.jpg"/>
           <p:cNvPicPr>
             <a:picLocks noChangeAspect="1"/>
           </p:cNvPicPr>
@@ -3648,7 +3648,7 @@
       </p:pic>
       <p:sp>
         <p:nvSpPr>
-          <p:cNvPr id="1048665" name="Text 0"/>
+          <p:cNvPr id="1048616" name="Text 0"/>
           <p:cNvSpPr/>
           <p:nvPr/>
         </p:nvSpPr>
@@ -3683,7 +3683,7 @@
       </p:sp>
       <p:sp>
         <p:nvSpPr>
-          <p:cNvPr id="1048666" name="Shape 1"/>
+          <p:cNvPr id="1048617" name="Shape 1"/>
           <p:cNvSpPr/>
           <p:nvPr/>
         </p:nvSpPr>
@@ -3708,7 +3708,7 @@
       </p:sp>
       <p:sp>
         <p:nvSpPr>
-          <p:cNvPr id="1048667" name="Text 2"/>
+          <p:cNvPr id="1048618" name="Text 2"/>
           <p:cNvSpPr/>
           <p:nvPr/>
         </p:nvSpPr>
@@ -3919,7 +3919,7 @@
       </p:sp>
       <p:sp>
         <p:nvSpPr>
-          <p:cNvPr id="1048668" name="Text 3"/>
+          <p:cNvPr id="1048619" name="Text 3"/>
           <p:cNvSpPr/>
           <p:nvPr/>
         </p:nvSpPr>
@@ -4467,7 +4467,7 @@
       </p:sp>
       <p:sp>
         <p:nvSpPr>
-          <p:cNvPr id="1048669" name="Shape 4"/>
+          <p:cNvPr id="1048620" name="Shape 4"/>
           <p:cNvSpPr/>
           <p:nvPr/>
         </p:nvSpPr>
@@ -4492,7 +4492,7 @@
       </p:sp>
       <p:sp>
         <p:nvSpPr>
-          <p:cNvPr id="1048670" name="Text 5"/>
+          <p:cNvPr id="1048621" name="Text 5"/>
           <p:cNvSpPr/>
           <p:nvPr/>
         </p:nvSpPr>
@@ -4659,7 +4659,7 @@
       </p:sp>
       <p:sp>
         <p:nvSpPr>
-          <p:cNvPr id="1048671" name="Text 6"/>
+          <p:cNvPr id="1048622" name="Text 6"/>
           <p:cNvSpPr/>
           <p:nvPr/>
         </p:nvSpPr>
@@ -5420,7 +5420,7 @@
       </p:sp>
       <p:sp>
         <p:nvSpPr>
-          <p:cNvPr id="1048672" name="Shape 7"/>
+          <p:cNvPr id="1048623" name="Shape 7"/>
           <p:cNvSpPr/>
           <p:nvPr/>
         </p:nvSpPr>
@@ -5445,7 +5445,7 @@
       </p:sp>
       <p:sp>
         <p:nvSpPr>
-          <p:cNvPr id="1048673" name="Text 8"/>
+          <p:cNvPr id="1048624" name="Text 8"/>
           <p:cNvSpPr/>
           <p:nvPr/>
         </p:nvSpPr>
@@ -5733,7 +5733,7 @@
       </p:sp>
       <p:sp>
         <p:nvSpPr>
-          <p:cNvPr id="1048674" name="Text 9"/>
+          <p:cNvPr id="1048625" name="Text 9"/>
           <p:cNvSpPr/>
           <p:nvPr/>
         </p:nvSpPr>
@@ -6395,7 +6395,7 @@
       </p:sp>
       <p:sp>
         <p:nvSpPr>
-          <p:cNvPr id="1048675" name="Shape 10"/>
+          <p:cNvPr id="1048626" name="Shape 10"/>
           <p:cNvSpPr/>
           <p:nvPr/>
         </p:nvSpPr>
@@ -6420,7 +6420,7 @@
       </p:sp>
       <p:sp>
         <p:nvSpPr>
-          <p:cNvPr id="1048676" name="Text 11"/>
+          <p:cNvPr id="1048627" name="Text 11"/>
           <p:cNvSpPr/>
           <p:nvPr/>
         </p:nvSpPr>
@@ -6587,7 +6587,7 @@
       </p:sp>
       <p:sp>
         <p:nvSpPr>
-          <p:cNvPr id="1048677" name="Text 12"/>
+          <p:cNvPr id="1048628" name="Text 12"/>
           <p:cNvSpPr/>
           <p:nvPr/>
         </p:nvSpPr>
@@ -7488,7 +7488,7 @@
     </p:bg>
     <p:spTree>
       <p:nvGrpSpPr>
-        <p:cNvPr id="48" name=""/>
+        <p:cNvPr id="52" name=""/>
         <p:cNvGrpSpPr/>
         <p:nvPr/>
       </p:nvGrpSpPr>
@@ -7502,7 +7502,7 @@
       </p:grpSpPr>
       <p:pic>
         <p:nvPicPr>
-          <p:cNvPr id="2097163" name="Image 0" descr="https://upload.wikimedia.org/wikipedia/commons/thumb/2/21/Esox_lucius_2008.jpg/1280px-Esox_lucius_2008.jpg"/>
+          <p:cNvPr id="2097164" name="Image 0" descr="https://upload.wikimedia.org/wikipedia/commons/thumb/2/21/Esox_lucius_2008.jpg/1280px-Esox_lucius_2008.jpg"/>
           <p:cNvPicPr>
             <a:picLocks noChangeAspect="1"/>
           </p:cNvPicPr>
@@ -7525,7 +7525,7 @@
       </p:pic>
       <p:sp>
         <p:nvSpPr>
-          <p:cNvPr id="1048681" name="Shape 0"/>
+          <p:cNvPr id="1048687" name="Shape 0"/>
           <p:cNvSpPr/>
           <p:nvPr/>
         </p:nvSpPr>
@@ -7552,7 +7552,7 @@
       </p:sp>
       <p:sp>
         <p:nvSpPr>
-          <p:cNvPr id="1048682" name="Text 1"/>
+          <p:cNvPr id="1048688" name="Text 1"/>
           <p:cNvSpPr/>
           <p:nvPr/>
         </p:nvSpPr>
@@ -7587,7 +7587,7 @@
       </p:sp>
       <p:sp>
         <p:nvSpPr>
-          <p:cNvPr id="1048683" name="Text 2"/>
+          <p:cNvPr id="1048689" name="Text 2"/>
           <p:cNvSpPr/>
           <p:nvPr/>
         </p:nvSpPr>
@@ -7712,7 +7712,7 @@
     </p:bg>
     <p:spTree>
       <p:nvGrpSpPr>
-        <p:cNvPr id="51" name=""/>
+        <p:cNvPr id="55" name=""/>
         <p:cNvGrpSpPr/>
         <p:nvPr/>
       </p:nvGrpSpPr>
@@ -7726,7 +7726,7 @@
       </p:grpSpPr>
       <p:pic>
         <p:nvPicPr>
-          <p:cNvPr id="2097164" name="Image 0" descr="https://upload.wikimedia.org/wikipedia/commons/thumb/4/4e/Esox_lucius.jpg/1280px-Esox_lucius.jpg"/>
+          <p:cNvPr id="2097165" name="Image 0" descr="https://upload.wikimedia.org/wikipedia/commons/thumb/4/4e/Esox_lucius.jpg/1280px-Esox_lucius.jpg"/>
           <p:cNvPicPr>
             <a:picLocks noChangeAspect="1"/>
           </p:cNvPicPr>
@@ -7749,7 +7749,7 @@
       </p:pic>
       <p:sp>
         <p:nvSpPr>
-          <p:cNvPr id="1048687" name="Shape 0"/>
+          <p:cNvPr id="1048693" name="Shape 0"/>
           <p:cNvSpPr/>
           <p:nvPr/>
         </p:nvSpPr>
@@ -7776,7 +7776,7 @@
       </p:sp>
       <p:sp>
         <p:nvSpPr>
-          <p:cNvPr id="1048688" name="Text 1"/>
+          <p:cNvPr id="1048694" name="Text 1"/>
           <p:cNvSpPr/>
           <p:nvPr/>
         </p:nvSpPr>
@@ -7811,7 +7811,7 @@
       </p:sp>
       <p:sp>
         <p:nvSpPr>
-          <p:cNvPr id="1048689" name="Text 2"/>
+          <p:cNvPr id="1048695" name="Text 2"/>
           <p:cNvSpPr/>
           <p:nvPr/>
         </p:nvSpPr>
@@ -7932,7 +7932,7 @@
     </p:bg>
     <p:spTree>
       <p:nvGrpSpPr>
-        <p:cNvPr id="54" name=""/>
+        <p:cNvPr id="58" name=""/>
         <p:cNvGrpSpPr/>
         <p:nvPr/>
       </p:nvGrpSpPr>
@@ -7946,7 +7946,7 @@
       </p:grpSpPr>
       <p:pic>
         <p:nvPicPr>
-          <p:cNvPr id="2097165" name="Image 0" descr="https://upload.wikimedia.org/wikipedia/commons/thumb/e/e8/Esox_lucius_1.jpg/1280px-Esox_lucius_1.jpg"/>
+          <p:cNvPr id="2097166" name="Image 0" descr="https://upload.wikimedia.org/wikipedia/commons/thumb/e/e8/Esox_lucius_1.jpg/1280px-Esox_lucius_1.jpg"/>
           <p:cNvPicPr>
             <a:picLocks noChangeAspect="1"/>
           </p:cNvPicPr>
@@ -7971,7 +7971,7 @@
       </p:pic>
       <p:sp>
         <p:nvSpPr>
-          <p:cNvPr id="1048693" name="Shape 0"/>
+          <p:cNvPr id="1048699" name="Shape 0"/>
           <p:cNvSpPr/>
           <p:nvPr/>
         </p:nvSpPr>
@@ -7998,7 +7998,7 @@
       </p:sp>
       <p:sp>
         <p:nvSpPr>
-          <p:cNvPr id="1048694" name="Text 1"/>
+          <p:cNvPr id="1048700" name="Text 1"/>
           <p:cNvSpPr/>
           <p:nvPr/>
         </p:nvSpPr>
@@ -8033,7 +8033,7 @@
       </p:sp>
       <p:sp>
         <p:nvSpPr>
-          <p:cNvPr id="1048695" name="Text 2"/>
+          <p:cNvPr id="1048701" name="Text 2"/>
           <p:cNvSpPr/>
           <p:nvPr/>
         </p:nvSpPr>
@@ -8068,7 +8068,7 @@
       </p:sp>
       <p:sp>
         <p:nvSpPr>
-          <p:cNvPr id="1048696" name="Text 3"/>
+          <p:cNvPr id="1048702" name="Text 3"/>
           <p:cNvSpPr/>
           <p:nvPr/>
         </p:nvSpPr>
@@ -8122,7 +8122,7 @@
     </p:bg>
     <p:spTree>
       <p:nvGrpSpPr>
-        <p:cNvPr id="21" name=""/>
+        <p:cNvPr id="43" name=""/>
         <p:cNvGrpSpPr/>
         <p:nvPr/>
       </p:nvGrpSpPr>
@@ -8136,7 +8136,7 @@
       </p:grpSpPr>
       <p:pic>
         <p:nvPicPr>
-          <p:cNvPr id="2097153" name="Image 0" descr="https://upload.wikimedia.org/wikipedia/commons/thumb/2/21/Esox_lucius_2008.jpg/1280px-Esox_lucius_2008.jpg"/>
+          <p:cNvPr id="2097160" name="Image 0" descr="https://upload.wikimedia.org/wikipedia/commons/thumb/2/21/Esox_lucius_2008.jpg/1280px-Esox_lucius_2008.jpg"/>
           <p:cNvPicPr>
             <a:picLocks noChangeAspect="1"/>
           </p:cNvPicPr>
@@ -8159,7 +8159,7 @@
       </p:pic>
       <p:sp>
         <p:nvSpPr>
-          <p:cNvPr id="1048585" name="Shape 0"/>
+          <p:cNvPr id="1048661" name="Shape 0"/>
           <p:cNvSpPr/>
           <p:nvPr/>
         </p:nvSpPr>
@@ -8186,7 +8186,7 @@
       </p:sp>
       <p:sp>
         <p:nvSpPr>
-          <p:cNvPr id="1048586" name="Text 1"/>
+          <p:cNvPr id="1048662" name="Text 1"/>
           <p:cNvSpPr/>
           <p:nvPr/>
         </p:nvSpPr>
@@ -8221,7 +8221,7 @@
       </p:sp>
       <p:sp>
         <p:nvSpPr>
-          <p:cNvPr id="1048587" name="Shape 2"/>
+          <p:cNvPr id="1048663" name="Shape 2"/>
           <p:cNvSpPr/>
           <p:nvPr/>
         </p:nvSpPr>
@@ -8244,7 +8244,7 @@
       </p:sp>
       <p:sp>
         <p:nvSpPr>
-          <p:cNvPr id="1048588" name="Text 3"/>
+          <p:cNvPr id="1048664" name="Text 3"/>
           <p:cNvSpPr/>
           <p:nvPr/>
         </p:nvSpPr>
@@ -8279,7 +8279,7 @@
       </p:sp>
       <p:sp>
         <p:nvSpPr>
-          <p:cNvPr id="1048589" name="Shape 4"/>
+          <p:cNvPr id="1048665" name="Shape 4"/>
           <p:cNvSpPr/>
           <p:nvPr/>
         </p:nvSpPr>
@@ -8302,7 +8302,7 @@
       </p:sp>
       <p:sp>
         <p:nvSpPr>
-          <p:cNvPr id="1048590" name="Text 5"/>
+          <p:cNvPr id="1048666" name="Text 5"/>
           <p:cNvSpPr/>
           <p:nvPr/>
         </p:nvSpPr>
@@ -8337,7 +8337,7 @@
       </p:sp>
       <p:sp>
         <p:nvSpPr>
-          <p:cNvPr id="1048591" name="Shape 6"/>
+          <p:cNvPr id="1048667" name="Shape 6"/>
           <p:cNvSpPr/>
           <p:nvPr/>
         </p:nvSpPr>
@@ -8360,7 +8360,7 @@
       </p:sp>
       <p:sp>
         <p:nvSpPr>
-          <p:cNvPr id="1048592" name="Text 7"/>
+          <p:cNvPr id="1048668" name="Text 7"/>
           <p:cNvSpPr/>
           <p:nvPr/>
         </p:nvSpPr>
@@ -8395,7 +8395,7 @@
       </p:sp>
       <p:sp>
         <p:nvSpPr>
-          <p:cNvPr id="1048593" name="Shape 8"/>
+          <p:cNvPr id="1048669" name="Shape 8"/>
           <p:cNvSpPr/>
           <p:nvPr/>
         </p:nvSpPr>
@@ -8418,7 +8418,7 @@
       </p:sp>
       <p:sp>
         <p:nvSpPr>
-          <p:cNvPr id="1048594" name="Text 9"/>
+          <p:cNvPr id="1048670" name="Text 9"/>
           <p:cNvSpPr/>
           <p:nvPr/>
         </p:nvSpPr>
@@ -8472,7 +8472,7 @@
     </p:bg>
     <p:spTree>
       <p:nvGrpSpPr>
-        <p:cNvPr id="24" name=""/>
+        <p:cNvPr id="46" name=""/>
         <p:cNvGrpSpPr/>
         <p:nvPr/>
       </p:nvGrpSpPr>
@@ -8486,7 +8486,7 @@
       </p:grpSpPr>
       <p:pic>
         <p:nvPicPr>
-          <p:cNvPr id="2097154" name="Image 0" descr="https://upload.wikimedia.org/wikipedia/commons/thumb/4/4e/Esox_lucius.jpg/1280px-Esox_lucius.jpg"/>
+          <p:cNvPr id="2097161" name="Image 0" descr="https://upload.wikimedia.org/wikipedia/commons/thumb/4/4e/Esox_lucius.jpg/1280px-Esox_lucius.jpg"/>
           <p:cNvPicPr>
             <a:picLocks noChangeAspect="1"/>
           </p:cNvPicPr>
@@ -8509,7 +8509,7 @@
       </p:pic>
       <p:sp>
         <p:nvSpPr>
-          <p:cNvPr id="1048598" name="Shape 0"/>
+          <p:cNvPr id="1048674" name="Shape 0"/>
           <p:cNvSpPr/>
           <p:nvPr/>
         </p:nvSpPr>
@@ -8536,7 +8536,7 @@
       </p:sp>
       <p:sp>
         <p:nvSpPr>
-          <p:cNvPr id="1048599" name="Text 1"/>
+          <p:cNvPr id="1048675" name="Text 1"/>
           <p:cNvSpPr/>
           <p:nvPr/>
         </p:nvSpPr>
@@ -8571,7 +8571,7 @@
       </p:sp>
       <p:sp>
         <p:nvSpPr>
-          <p:cNvPr id="1048600" name="Text 2"/>
+          <p:cNvPr id="1048676" name="Text 2"/>
           <p:cNvSpPr/>
           <p:nvPr/>
         </p:nvSpPr>
@@ -8606,7 +8606,7 @@
       </p:sp>
       <p:sp>
         <p:nvSpPr>
-          <p:cNvPr id="1048601" name="Text 3"/>
+          <p:cNvPr id="1048677" name="Text 3"/>
           <p:cNvSpPr/>
           <p:nvPr/>
         </p:nvSpPr>
@@ -8733,7 +8733,7 @@
       </p:sp>
       <p:pic>
         <p:nvPicPr>
-          <p:cNvPr id="2097155" name="Picture 6" descr="Esox_lucius1-removebg-preview"/>
+          <p:cNvPr id="2097162" name="Picture 6" descr="Esox_lucius1-removebg-preview"/>
           <p:cNvPicPr>
             <a:picLocks noChangeAspect="1"/>
           </p:cNvPicPr>
@@ -8774,7 +8774,7 @@
     </p:bg>
     <p:spTree>
       <p:nvGrpSpPr>
-        <p:cNvPr id="27" name=""/>
+        <p:cNvPr id="49" name=""/>
         <p:cNvGrpSpPr/>
         <p:nvPr/>
       </p:nvGrpSpPr>
@@ -8788,7 +8788,7 @@
       </p:grpSpPr>
       <p:pic>
         <p:nvPicPr>
-          <p:cNvPr id="2097156" name="Image 0" descr="https://upload.wikimedia.org/wikipedia/commons/thumb/2/21/Esox_lucius_2008.jpg/1280px-Esox_lucius_2008.jpg"/>
+          <p:cNvPr id="2097163" name="Image 0" descr="https://upload.wikimedia.org/wikipedia/commons/thumb/2/21/Esox_lucius_2008.jpg/1280px-Esox_lucius_2008.jpg"/>
           <p:cNvPicPr>
             <a:picLocks noChangeAspect="1"/>
           </p:cNvPicPr>
@@ -8811,7 +8811,7 @@
       </p:pic>
       <p:sp>
         <p:nvSpPr>
-          <p:cNvPr id="1048605" name="Shape 0"/>
+          <p:cNvPr id="1048681" name="Shape 0"/>
           <p:cNvSpPr/>
           <p:nvPr/>
         </p:nvSpPr>
@@ -8838,7 +8838,7 @@
       </p:sp>
       <p:sp>
         <p:nvSpPr>
-          <p:cNvPr id="1048606" name="Text 1"/>
+          <p:cNvPr id="1048682" name="Text 1"/>
           <p:cNvSpPr/>
           <p:nvPr/>
         </p:nvSpPr>
@@ -8873,7 +8873,7 @@
       </p:sp>
       <p:sp>
         <p:nvSpPr>
-          <p:cNvPr id="1048607" name="Text 2"/>
+          <p:cNvPr id="1048683" name="Text 2"/>
           <p:cNvSpPr/>
           <p:nvPr/>
         </p:nvSpPr>
@@ -8998,7 +8998,7 @@
     </p:bg>
     <p:spTree>
       <p:nvGrpSpPr>
-        <p:cNvPr id="30" name=""/>
+        <p:cNvPr id="37" name=""/>
         <p:cNvGrpSpPr/>
         <p:nvPr/>
       </p:nvGrpSpPr>
@@ -9012,7 +9012,7 @@
       </p:grpSpPr>
       <p:pic>
         <p:nvPicPr>
-          <p:cNvPr id="2097157" name="Image 0" descr="https://upload.wikimedia.org/wikipedia/commons/thumb/e/e8/Esox_lucius_1.jpg/1280px-Esox_lucius_1.jpg"/>
+          <p:cNvPr id="2097158" name="Image 0" descr="https://upload.wikimedia.org/wikipedia/commons/thumb/e/e8/Esox_lucius_1.jpg/1280px-Esox_lucius_1.jpg"/>
           <p:cNvPicPr>
             <a:picLocks noChangeAspect="1"/>
           </p:cNvPicPr>
@@ -9037,7 +9037,7 @@
       </p:pic>
       <p:sp>
         <p:nvSpPr>
-          <p:cNvPr id="1048611" name="Shape 0"/>
+          <p:cNvPr id="1048632" name="Shape 0"/>
           <p:cNvSpPr/>
           <p:nvPr/>
         </p:nvSpPr>
@@ -9064,7 +9064,7 @@
       </p:sp>
       <p:sp>
         <p:nvSpPr>
-          <p:cNvPr id="1048612" name="Text 1"/>
+          <p:cNvPr id="1048633" name="Text 1"/>
           <p:cNvSpPr/>
           <p:nvPr/>
         </p:nvSpPr>
@@ -9099,7 +9099,7 @@
       </p:sp>
       <p:sp>
         <p:nvSpPr>
-          <p:cNvPr id="1048613" name="Shape 2"/>
+          <p:cNvPr id="1048634" name="Shape 2"/>
           <p:cNvSpPr/>
           <p:nvPr/>
         </p:nvSpPr>
@@ -9122,7 +9122,7 @@
       </p:sp>
       <p:sp>
         <p:nvSpPr>
-          <p:cNvPr id="1048614" name="Text 3"/>
+          <p:cNvPr id="1048635" name="Text 3"/>
           <p:cNvSpPr/>
           <p:nvPr/>
         </p:nvSpPr>
@@ -9157,7 +9157,7 @@
       </p:sp>
       <p:sp>
         <p:nvSpPr>
-          <p:cNvPr id="1048615" name="Shape 4"/>
+          <p:cNvPr id="1048636" name="Shape 4"/>
           <p:cNvSpPr/>
           <p:nvPr/>
         </p:nvSpPr>
@@ -9178,7 +9178,7 @@
       </p:sp>
       <p:sp>
         <p:nvSpPr>
-          <p:cNvPr id="1048616" name="Shape 5"/>
+          <p:cNvPr id="1048637" name="Shape 5"/>
           <p:cNvSpPr/>
           <p:nvPr/>
         </p:nvSpPr>
@@ -9201,7 +9201,7 @@
       </p:sp>
       <p:sp>
         <p:nvSpPr>
-          <p:cNvPr id="1048617" name="Text 6"/>
+          <p:cNvPr id="1048638" name="Text 6"/>
           <p:cNvSpPr/>
           <p:nvPr/>
         </p:nvSpPr>
@@ -9236,7 +9236,7 @@
       </p:sp>
       <p:sp>
         <p:nvSpPr>
-          <p:cNvPr id="1048618" name="Shape 7"/>
+          <p:cNvPr id="1048639" name="Shape 7"/>
           <p:cNvSpPr/>
           <p:nvPr/>
         </p:nvSpPr>
@@ -9257,7 +9257,7 @@
       </p:sp>
       <p:sp>
         <p:nvSpPr>
-          <p:cNvPr id="1048619" name="Shape 8"/>
+          <p:cNvPr id="1048640" name="Shape 8"/>
           <p:cNvSpPr/>
           <p:nvPr/>
         </p:nvSpPr>
@@ -9280,7 +9280,7 @@
       </p:sp>
       <p:sp>
         <p:nvSpPr>
-          <p:cNvPr id="1048620" name="Text 9"/>
+          <p:cNvPr id="1048641" name="Text 9"/>
           <p:cNvSpPr/>
           <p:nvPr/>
         </p:nvSpPr>
@@ -9315,7 +9315,7 @@
       </p:sp>
       <p:sp>
         <p:nvSpPr>
-          <p:cNvPr id="1048621" name="Shape 10"/>
+          <p:cNvPr id="1048642" name="Shape 10"/>
           <p:cNvSpPr/>
           <p:nvPr/>
         </p:nvSpPr>
@@ -9336,7 +9336,7 @@
       </p:sp>
       <p:sp>
         <p:nvSpPr>
-          <p:cNvPr id="1048622" name="Shape 11"/>
+          <p:cNvPr id="1048643" name="Shape 11"/>
           <p:cNvSpPr/>
           <p:nvPr/>
         </p:nvSpPr>
@@ -9359,7 +9359,7 @@
       </p:sp>
       <p:sp>
         <p:nvSpPr>
-          <p:cNvPr id="1048623" name="Text 12"/>
+          <p:cNvPr id="1048644" name="Text 12"/>
           <p:cNvSpPr/>
           <p:nvPr/>
         </p:nvSpPr>
@@ -9394,7 +9394,7 @@
       </p:sp>
       <p:sp>
         <p:nvSpPr>
-          <p:cNvPr id="1048624" name="Shape 13"/>
+          <p:cNvPr id="1048645" name="Shape 13"/>
           <p:cNvSpPr/>
           <p:nvPr/>
         </p:nvSpPr>
@@ -9415,7 +9415,7 @@
       </p:sp>
       <p:sp>
         <p:nvSpPr>
-          <p:cNvPr id="1048625" name="Shape 14"/>
+          <p:cNvPr id="1048646" name="Shape 14"/>
           <p:cNvSpPr/>
           <p:nvPr/>
         </p:nvSpPr>
@@ -9438,7 +9438,7 @@
       </p:sp>
       <p:sp>
         <p:nvSpPr>
-          <p:cNvPr id="1048626" name="Text 15"/>
+          <p:cNvPr id="1048647" name="Text 15"/>
           <p:cNvSpPr/>
           <p:nvPr/>
         </p:nvSpPr>
@@ -9473,7 +9473,7 @@
       </p:sp>
       <p:sp>
         <p:nvSpPr>
-          <p:cNvPr id="1048627" name="Text 16"/>
+          <p:cNvPr id="1048648" name="Text 16"/>
           <p:cNvSpPr/>
           <p:nvPr/>
         </p:nvSpPr>
@@ -9573,7 +9573,7 @@
     </p:bg>
     <p:spTree>
       <p:nvGrpSpPr>
-        <p:cNvPr id="33" name=""/>
+        <p:cNvPr id="31" name=""/>
         <p:cNvGrpSpPr/>
         <p:nvPr/>
       </p:nvGrpSpPr>
@@ -9587,7 +9587,7 @@
       </p:grpSpPr>
       <p:pic>
         <p:nvPicPr>
-          <p:cNvPr id="2097158" name="Image 0" descr="https://upload.wikimedia.org/wikipedia/commons/thumb/4/4e/Esox_lucius.jpg/1280px-Esox_lucius.jpg"/>
+          <p:cNvPr id="2097156" name="Image 0" descr="https://upload.wikimedia.org/wikipedia/commons/thumb/4/4e/Esox_lucius.jpg/1280px-Esox_lucius.jpg"/>
           <p:cNvPicPr>
             <a:picLocks noChangeAspect="1"/>
           </p:cNvPicPr>
@@ -9610,7 +9610,7 @@
       </p:pic>
       <p:sp>
         <p:nvSpPr>
-          <p:cNvPr id="1048631" name="Shape 0"/>
+          <p:cNvPr id="1048610" name="Shape 0"/>
           <p:cNvSpPr/>
           <p:nvPr/>
         </p:nvSpPr>
@@ -9637,7 +9637,7 @@
       </p:sp>
       <p:sp>
         <p:nvSpPr>
-          <p:cNvPr id="1048632" name="Text 1"/>
+          <p:cNvPr id="1048611" name="Text 1"/>
           <p:cNvSpPr/>
           <p:nvPr/>
         </p:nvSpPr>
@@ -9672,7 +9672,7 @@
       </p:sp>
       <p:sp>
         <p:nvSpPr>
-          <p:cNvPr id="1048633" name="Text 2"/>
+          <p:cNvPr id="1048612" name="Text 2"/>
           <p:cNvSpPr/>
           <p:nvPr/>
         </p:nvSpPr>
@@ -9797,7 +9797,7 @@
     </p:bg>
     <p:spTree>
       <p:nvGrpSpPr>
-        <p:cNvPr id="36" name=""/>
+        <p:cNvPr id="25" name=""/>
         <p:cNvGrpSpPr/>
         <p:nvPr/>
       </p:nvGrpSpPr>
@@ -9811,7 +9811,7 @@
       </p:grpSpPr>
       <p:sp>
         <p:nvSpPr>
-          <p:cNvPr id="1048637" name="Text 0"/>
+          <p:cNvPr id="1048588" name="Text 0"/>
           <p:cNvSpPr/>
           <p:nvPr/>
         </p:nvSpPr>
@@ -9846,7 +9846,7 @@
       </p:sp>
       <p:sp>
         <p:nvSpPr>
-          <p:cNvPr id="1048638" name="Shape 1"/>
+          <p:cNvPr id="1048589" name="Shape 1"/>
           <p:cNvSpPr/>
           <p:nvPr/>
         </p:nvSpPr>
@@ -9876,7 +9876,7 @@
       </p:sp>
       <p:sp>
         <p:nvSpPr>
-          <p:cNvPr id="1048639" name="Shape 2"/>
+          <p:cNvPr id="1048590" name="Shape 2"/>
           <p:cNvSpPr/>
           <p:nvPr/>
         </p:nvSpPr>
@@ -9899,7 +9899,7 @@
       </p:sp>
       <p:sp>
         <p:nvSpPr>
-          <p:cNvPr id="1048640" name="Text 3"/>
+          <p:cNvPr id="1048591" name="Text 3"/>
           <p:cNvSpPr/>
           <p:nvPr/>
         </p:nvSpPr>
@@ -9934,7 +9934,7 @@
       </p:sp>
       <p:sp>
         <p:nvSpPr>
-          <p:cNvPr id="1048641" name="Text 4"/>
+          <p:cNvPr id="1048592" name="Text 4"/>
           <p:cNvSpPr/>
           <p:nvPr/>
         </p:nvSpPr>
@@ -9969,7 +9969,7 @@
       </p:sp>
       <p:sp>
         <p:nvSpPr>
-          <p:cNvPr id="1048642" name="Shape 5"/>
+          <p:cNvPr id="1048593" name="Shape 5"/>
           <p:cNvSpPr/>
           <p:nvPr/>
         </p:nvSpPr>
@@ -9999,7 +9999,7 @@
       </p:sp>
       <p:sp>
         <p:nvSpPr>
-          <p:cNvPr id="1048643" name="Shape 6"/>
+          <p:cNvPr id="1048594" name="Shape 6"/>
           <p:cNvSpPr/>
           <p:nvPr/>
         </p:nvSpPr>
@@ -10022,7 +10022,7 @@
       </p:sp>
       <p:sp>
         <p:nvSpPr>
-          <p:cNvPr id="1048644" name="Text 7"/>
+          <p:cNvPr id="1048595" name="Text 7"/>
           <p:cNvSpPr/>
           <p:nvPr/>
         </p:nvSpPr>
@@ -10057,7 +10057,7 @@
       </p:sp>
       <p:sp>
         <p:nvSpPr>
-          <p:cNvPr id="1048645" name="Text 8"/>
+          <p:cNvPr id="1048596" name="Text 8"/>
           <p:cNvSpPr/>
           <p:nvPr/>
         </p:nvSpPr>
@@ -10092,7 +10092,7 @@
       </p:sp>
       <p:sp>
         <p:nvSpPr>
-          <p:cNvPr id="1048646" name="Shape 9"/>
+          <p:cNvPr id="1048597" name="Shape 9"/>
           <p:cNvSpPr/>
           <p:nvPr/>
         </p:nvSpPr>
@@ -10122,7 +10122,7 @@
       </p:sp>
       <p:sp>
         <p:nvSpPr>
-          <p:cNvPr id="1048647" name="Shape 10"/>
+          <p:cNvPr id="1048598" name="Shape 10"/>
           <p:cNvSpPr/>
           <p:nvPr/>
         </p:nvSpPr>
@@ -10145,7 +10145,7 @@
       </p:sp>
       <p:sp>
         <p:nvSpPr>
-          <p:cNvPr id="1048648" name="Text 11"/>
+          <p:cNvPr id="1048599" name="Text 11"/>
           <p:cNvSpPr/>
           <p:nvPr/>
         </p:nvSpPr>
@@ -10180,7 +10180,7 @@
       </p:sp>
       <p:sp>
         <p:nvSpPr>
-          <p:cNvPr id="1048649" name="Text 12"/>
+          <p:cNvPr id="1048600" name="Text 12"/>
           <p:cNvSpPr/>
           <p:nvPr/>
         </p:nvSpPr>
@@ -10215,7 +10215,7 @@
       </p:sp>
       <p:pic>
         <p:nvPicPr>
-          <p:cNvPr id="2097159" name="Image 0" descr="https://upload.wikimedia.org/wikipedia/commons/thumb/e/e8/Esox_lucius_1.jpg/1280px-Esox_lucius_1.jpg"/>
+          <p:cNvPr id="2097154" name="Image 0" descr="https://upload.wikimedia.org/wikipedia/commons/thumb/e/e8/Esox_lucius_1.jpg/1280px-Esox_lucius_1.jpg"/>
           <p:cNvPicPr>
             <a:picLocks noChangeAspect="1"/>
           </p:cNvPicPr>
@@ -10259,7 +10259,7 @@
     </p:bg>
     <p:spTree>
       <p:nvGrpSpPr>
-        <p:cNvPr id="39" name=""/>
+        <p:cNvPr id="15" name=""/>
         <p:cNvGrpSpPr/>
         <p:nvPr/>
       </p:nvGrpSpPr>
@@ -10273,7 +10273,7 @@
       </p:grpSpPr>
       <p:pic>
         <p:nvPicPr>
-          <p:cNvPr id="2097160" name="Image 0" descr="https://upload.wikimedia.org/wikipedia/commons/thumb/2/21/Esox_lucius_2008.jpg/1280px-Esox_lucius_2008.jpg"/>
+          <p:cNvPr id="2097152" name="Image 0" descr="https://upload.wikimedia.org/wikipedia/commons/thumb/2/21/Esox_lucius_2008.jpg/1280px-Esox_lucius_2008.jpg"/>
           <p:cNvPicPr>
             <a:picLocks noChangeAspect="1"/>
           </p:cNvPicPr>
@@ -10296,7 +10296,7 @@
       </p:pic>
       <p:sp>
         <p:nvSpPr>
-          <p:cNvPr id="1048653" name="Shape 0"/>
+          <p:cNvPr id="1048576" name="Shape 0"/>
           <p:cNvSpPr/>
           <p:nvPr/>
         </p:nvSpPr>
@@ -10323,7 +10323,7 @@
       </p:sp>
       <p:sp>
         <p:nvSpPr>
-          <p:cNvPr id="1048654" name="Text 1"/>
+          <p:cNvPr id="1048577" name="Text 1"/>
           <p:cNvSpPr/>
           <p:nvPr/>
         </p:nvSpPr>
@@ -10358,7 +10358,7 @@
       </p:sp>
       <p:sp>
         <p:nvSpPr>
-          <p:cNvPr id="1048655" name="Text 2"/>
+          <p:cNvPr id="1048578" name="Text 2"/>
           <p:cNvSpPr/>
           <p:nvPr/>
         </p:nvSpPr>
@@ -10431,7 +10431,51 @@
                 <a:ea typeface="Calibri" panose="020F0502020204030204" pitchFamily="34" charset="-122"/>
                 <a:cs typeface="Calibri" panose="020F0502020204030204" pitchFamily="34" charset="-120"/>
               </a:rPr>
-              <a:t>postranná čiara zachytáva pohyby a vibrácie vo vode</a:t>
+              <a:t>b</a:t>
+            </a:r>
+            <a:r>
+              <a:rPr dirty="0" sz="1400" lang="en-US">
+                <a:solidFill>
+                  <a:srgbClr val="FFFFFF"/>
+                </a:solidFill>
+                <a:latin typeface="Calibri" panose="020F0502020204030204" pitchFamily="34" charset="0"/>
+                <a:ea typeface="Calibri" panose="020F0502020204030204" pitchFamily="34" charset="-122"/>
+                <a:cs typeface="Calibri" panose="020F0502020204030204" pitchFamily="34" charset="-120"/>
+              </a:rPr>
+              <a:t>o</a:t>
+            </a:r>
+            <a:r>
+              <a:rPr altLang="en-US" dirty="0" sz="1400" lang="sk-SK">
+                <a:solidFill>
+                  <a:srgbClr val="FFFFFF"/>
+                </a:solidFill>
+                <a:latin typeface="Calibri" panose="020F0502020204030204" pitchFamily="34" charset="0"/>
+                <a:ea typeface="Calibri" panose="020F0502020204030204" pitchFamily="34" charset="-122"/>
+                <a:cs typeface="Calibri" panose="020F0502020204030204" pitchFamily="34" charset="-120"/>
+              </a:rPr>
+              <a:t>č</a:t>
+            </a:r>
+            <a:r>
+              <a:rPr altLang="en-US" dirty="0" sz="1400" lang="en-US">
+                <a:solidFill>
+                  <a:srgbClr val="FFFFFF"/>
+                </a:solidFill>
+                <a:latin typeface="Calibri" panose="020F0502020204030204" pitchFamily="34" charset="0"/>
+                <a:ea typeface="Calibri" panose="020F0502020204030204" pitchFamily="34" charset="-122"/>
+                <a:cs typeface="Calibri" panose="020F0502020204030204" pitchFamily="34" charset="-120"/>
+              </a:rPr>
+              <a:t>n</a:t>
+            </a:r>
+            <a:r>
+              <a:rPr dirty="0" sz="1400" lang="en-US">
+                <a:solidFill>
+                  <a:srgbClr val="FFFFFF"/>
+                </a:solidFill>
+                <a:latin typeface="Calibri" panose="020F0502020204030204" pitchFamily="34" charset="0"/>
+                <a:ea typeface="Calibri" panose="020F0502020204030204" pitchFamily="34" charset="-122"/>
+                <a:cs typeface="Calibri" panose="020F0502020204030204" pitchFamily="34" charset="-120"/>
+              </a:rPr>
+              <a:t>á čiara zachytáva pohyby a vibrácie vo vode</a:t>
             </a:r>
             <a:endParaRPr dirty="0" sz="1400" lang="en-US"/>
           </a:p>
@@ -10458,7 +10502,7 @@
     </p:bg>
     <p:spTree>
       <p:nvGrpSpPr>
-        <p:cNvPr id="42" name=""/>
+        <p:cNvPr id="22" name=""/>
         <p:cNvGrpSpPr/>
         <p:nvPr/>
       </p:nvGrpSpPr>
@@ -10472,7 +10516,7 @@
       </p:grpSpPr>
       <p:pic>
         <p:nvPicPr>
-          <p:cNvPr id="2097161" name="Image 0" descr="https://upload.wikimedia.org/wikipedia/commons/thumb/4/4e/Esox_lucius.jpg/1280px-Esox_lucius.jpg"/>
+          <p:cNvPr id="2097153" name="Image 0" descr="https://upload.wikimedia.org/wikipedia/commons/thumb/4/4e/Esox_lucius.jpg/1280px-Esox_lucius.jpg"/>
           <p:cNvPicPr>
             <a:picLocks noChangeAspect="1"/>
           </p:cNvPicPr>
@@ -10495,7 +10539,7 @@
       </p:pic>
       <p:sp>
         <p:nvSpPr>
-          <p:cNvPr id="1048659" name="Shape 0"/>
+          <p:cNvPr id="1048582" name="Shape 0"/>
           <p:cNvSpPr/>
           <p:nvPr/>
         </p:nvSpPr>
@@ -10522,7 +10566,7 @@
       </p:sp>
       <p:sp>
         <p:nvSpPr>
-          <p:cNvPr id="1048660" name="Text 1"/>
+          <p:cNvPr id="1048583" name="Text 1"/>
           <p:cNvSpPr/>
           <p:nvPr/>
         </p:nvSpPr>
@@ -10557,7 +10601,7 @@
       </p:sp>
       <p:sp>
         <p:nvSpPr>
-          <p:cNvPr id="1048661" name="Text 2"/>
+          <p:cNvPr id="1048584" name="Text 2"/>
           <p:cNvSpPr/>
           <p:nvPr/>
         </p:nvSpPr>
